--- a/media/resources/files/EkiOrunduuOnduktar_Koshuu_Kemituu_TuuraJanaKata.pptx
+++ b/media/resources/files/EkiOrunduuOnduktar_Koshuu_Kemituu_TuuraJanaKata.pptx
@@ -4797,7 +4797,7 @@
             </a:pPr>
             <a:r>
               <a:rPr lang="ru-RU" dirty="0"/>
-              <a:t>Турдуу пикирлер учун ыраазычылык билдиребиз.</a:t>
+              <a:t>Түрдүү пикирлер үчүн ыраазычылык билдиребиз.</a:t>
             </a:r>
           </a:p>
           <a:p>

--- a/media/resources/files/EkiOrunduuOnduktar_Koshuu_Kemituu_TuuraJanaKata.pptx
+++ b/media/resources/files/EkiOrunduuOnduktar_Koshuu_Kemituu_TuuraJanaKata.pptx
@@ -4577,7 +4577,7 @@
           <a:p>
             <a:r>
               <a:rPr lang="ru-RU" dirty="0"/>
-              <a:t>Бул ресурс математикалык ыкманын жандуу демонстрацияларын камсыз кылат.</a:t>
+              <a:t>Бул ресурс ыкманы жандуу көрсөтөт.</a:t>
             </a:r>
           </a:p>
           <a:p>
@@ -5146,7 +5146,7 @@
           <a:p>
             <a:r>
               <a:rPr lang="en-GB" sz="2400" dirty="0"/>
-              <a:t>= 2.79</a:t>
+              <a:t>= 2,79</a:t>
             </a:r>
           </a:p>
         </p:txBody>
@@ -5181,7 +5181,7 @@
           <a:p>
             <a:r>
               <a:rPr lang="en-GB" sz="2400" dirty="0"/>
-              <a:t>= 4.1</a:t>
+              <a:t>= 4,1</a:t>
             </a:r>
           </a:p>
         </p:txBody>
@@ -5216,7 +5216,7 @@
           <a:p>
             <a:r>
               <a:rPr lang="en-GB" sz="2400" dirty="0"/>
-              <a:t>= 4.65</a:t>
+              <a:t>= 4,65</a:t>
             </a:r>
           </a:p>
         </p:txBody>
@@ -5251,7 +5251,7 @@
           <a:p>
             <a:r>
               <a:rPr lang="en-GB" sz="2400" dirty="0"/>
-              <a:t>= 6.89</a:t>
+              <a:t>= 6,89</a:t>
             </a:r>
           </a:p>
         </p:txBody>
@@ -5321,7 +5321,7 @@
           <a:p>
             <a:r>
               <a:rPr lang="en-GB" sz="2400" dirty="0"/>
-              <a:t>= 0.79</a:t>
+              <a:t>= 0,79</a:t>
             </a:r>
           </a:p>
         </p:txBody>
@@ -5356,7 +5356,7 @@
           <a:p>
             <a:r>
               <a:rPr lang="en-GB" sz="2400" dirty="0"/>
-              <a:t>= 7.99</a:t>
+              <a:t>= 7,99</a:t>
             </a:r>
           </a:p>
         </p:txBody>
@@ -5391,7 +5391,7 @@
           <a:p>
             <a:r>
               <a:rPr lang="en-GB" sz="2400" dirty="0"/>
-              <a:t>= 1.78</a:t>
+              <a:t>= 1,78</a:t>
             </a:r>
           </a:p>
         </p:txBody>
@@ -5426,7 +5426,7 @@
           <a:p>
             <a:r>
               <a:rPr lang="en-GB" sz="2400" dirty="0"/>
-              <a:t>= 0.98</a:t>
+              <a:t>= 0,98</a:t>
             </a:r>
           </a:p>
         </p:txBody>
@@ -5461,7 +5461,7 @@
           <a:p>
             <a:r>
               <a:rPr lang="en-GB" sz="2400" dirty="0"/>
-              <a:t>= 2.812</a:t>
+              <a:t>= 2,812</a:t>
             </a:r>
           </a:p>
         </p:txBody>
@@ -5496,7 +5496,7 @@
           <a:p>
             <a:r>
               <a:rPr lang="en-GB" sz="2400" dirty="0"/>
-              <a:t>= 1.935</a:t>
+              <a:t>= 1,935</a:t>
             </a:r>
           </a:p>
         </p:txBody>
@@ -6917,7 +6917,7 @@
           <a:p>
             <a:r>
               <a:rPr lang="en-GB" sz="2400" dirty="0"/>
-              <a:t>= 2.79</a:t>
+              <a:t>= 2,79</a:t>
             </a:r>
           </a:p>
         </p:txBody>
@@ -7153,7 +7153,7 @@
           <a:p>
             <a:r>
               <a:rPr lang="en-GB" sz="2400" dirty="0"/>
-              <a:t>= 4.1</a:t>
+              <a:t>= 4,1</a:t>
             </a:r>
           </a:p>
         </p:txBody>
@@ -7507,7 +7507,7 @@
           <a:p>
             <a:r>
               <a:rPr lang="en-GB" sz="2400" dirty="0"/>
-              <a:t>= 4.65</a:t>
+              <a:t>= 4,65</a:t>
             </a:r>
           </a:p>
         </p:txBody>
@@ -7861,7 +7861,7 @@
           <a:p>
             <a:r>
               <a:rPr lang="en-GB" sz="2400" dirty="0"/>
-              <a:t>= 6.89</a:t>
+              <a:t>= 6,89</a:t>
             </a:r>
           </a:p>
         </p:txBody>
@@ -8277,7 +8277,7 @@
           <a:p>
             <a:r>
               <a:rPr lang="en-GB" sz="2400" dirty="0"/>
-              <a:t>= 0.79</a:t>
+              <a:t>= 0,79</a:t>
             </a:r>
           </a:p>
         </p:txBody>
@@ -8631,7 +8631,7 @@
           <a:p>
             <a:r>
               <a:rPr lang="en-GB" sz="2400" dirty="0"/>
-              <a:t>= 7.99</a:t>
+              <a:t>= 7,99</a:t>
             </a:r>
           </a:p>
         </p:txBody>
@@ -8985,7 +8985,7 @@
           <a:p>
             <a:r>
               <a:rPr lang="en-GB" sz="2400" dirty="0"/>
-              <a:t>= 1.78</a:t>
+              <a:t>= 1,78</a:t>
             </a:r>
           </a:p>
         </p:txBody>
@@ -9256,7 +9256,7 @@
           <a:p>
             <a:r>
               <a:rPr lang="en-GB" sz="2400" dirty="0"/>
-              <a:t>= 0.98</a:t>
+              <a:t>= 0,98</a:t>
             </a:r>
           </a:p>
         </p:txBody>
@@ -9540,7 +9540,7 @@
           <a:p>
             <a:r>
               <a:rPr lang="en-GB" sz="2400" dirty="0"/>
-              <a:t>= 2.812</a:t>
+              <a:t>= 2,812</a:t>
             </a:r>
           </a:p>
         </p:txBody>
@@ -9886,7 +9886,7 @@
           <a:p>
             <a:r>
               <a:rPr lang="en-GB" sz="2400" dirty="0"/>
-              <a:t>= 1.935</a:t>
+              <a:t>= 1,935</a:t>
             </a:r>
           </a:p>
         </p:txBody>
@@ -11070,7 +11070,7 @@
           <a:p>
             <a:r>
               <a:rPr lang="en-GB" sz="2400" dirty="0"/>
-              <a:t>= 2.79</a:t>
+              <a:t>= 2,79</a:t>
             </a:r>
           </a:p>
         </p:txBody>
@@ -11306,7 +11306,7 @@
           <a:p>
             <a:r>
               <a:rPr lang="en-GB" sz="2400" dirty="0"/>
-              <a:t>= 4.1</a:t>
+              <a:t>= 4,1</a:t>
             </a:r>
           </a:p>
         </p:txBody>
@@ -11660,7 +11660,7 @@
           <a:p>
             <a:r>
               <a:rPr lang="en-GB" sz="2400" dirty="0"/>
-              <a:t>= 4.65</a:t>
+              <a:t>= 4,65</a:t>
             </a:r>
           </a:p>
         </p:txBody>
@@ -12014,7 +12014,7 @@
           <a:p>
             <a:r>
               <a:rPr lang="en-GB" sz="2400" dirty="0"/>
-              <a:t>= 6.89</a:t>
+              <a:t>= 6,89</a:t>
             </a:r>
           </a:p>
         </p:txBody>
@@ -12473,7 +12473,7 @@
           <a:p>
             <a:r>
               <a:rPr lang="en-GB" sz="2400" dirty="0"/>
-              <a:t>= 2.812</a:t>
+              <a:t>= 2,812</a:t>
             </a:r>
           </a:p>
         </p:txBody>
@@ -12710,7 +12710,7 @@
           <a:p>
             <a:r>
               <a:rPr lang="en-GB" sz="2400" dirty="0"/>
-              <a:t>= 2.79</a:t>
+              <a:t>= 2,79</a:t>
             </a:r>
           </a:p>
         </p:txBody>
@@ -12745,7 +12745,7 @@
           <a:p>
             <a:r>
               <a:rPr lang="en-GB" sz="2400" dirty="0"/>
-              <a:t>= 4.1</a:t>
+              <a:t>= 4,1</a:t>
             </a:r>
           </a:p>
         </p:txBody>
@@ -12780,7 +12780,7 @@
           <a:p>
             <a:r>
               <a:rPr lang="en-GB" sz="2400" dirty="0"/>
-              <a:t>= 4.65</a:t>
+              <a:t>= 4,65</a:t>
             </a:r>
           </a:p>
         </p:txBody>
@@ -12815,7 +12815,7 @@
           <a:p>
             <a:r>
               <a:rPr lang="en-GB" sz="2400" dirty="0"/>
-              <a:t>= 6.89</a:t>
+              <a:t>= 6,89</a:t>
             </a:r>
           </a:p>
         </p:txBody>
@@ -12885,7 +12885,7 @@
           <a:p>
             <a:r>
               <a:rPr lang="en-GB" sz="2400" dirty="0"/>
-              <a:t>= 0.79</a:t>
+              <a:t>= 0,79</a:t>
             </a:r>
           </a:p>
         </p:txBody>
@@ -12920,7 +12920,7 @@
           <a:p>
             <a:r>
               <a:rPr lang="en-GB" sz="2400" dirty="0"/>
-              <a:t>= 7.99</a:t>
+              <a:t>= 7,99</a:t>
             </a:r>
           </a:p>
         </p:txBody>
@@ -12955,7 +12955,7 @@
           <a:p>
             <a:r>
               <a:rPr lang="en-GB" sz="2400" dirty="0"/>
-              <a:t>= 1.78</a:t>
+              <a:t>= 1,78</a:t>
             </a:r>
           </a:p>
         </p:txBody>
@@ -12990,7 +12990,7 @@
           <a:p>
             <a:r>
               <a:rPr lang="en-GB" sz="2400" dirty="0"/>
-              <a:t>= 0.98</a:t>
+              <a:t>= 0,98</a:t>
             </a:r>
           </a:p>
         </p:txBody>
@@ -13025,7 +13025,7 @@
           <a:p>
             <a:r>
               <a:rPr lang="en-GB" sz="2400" dirty="0"/>
-              <a:t>= 2.812</a:t>
+              <a:t>= 2,812</a:t>
             </a:r>
           </a:p>
         </p:txBody>
@@ -13060,7 +13060,7 @@
           <a:p>
             <a:r>
               <a:rPr lang="en-GB" sz="2400" dirty="0"/>
-              <a:t>= 1.935</a:t>
+              <a:t>= 1,935</a:t>
             </a:r>
           </a:p>
         </p:txBody>
@@ -14443,7 +14443,7 @@
           <a:p>
             <a:r>
               <a:rPr lang="en-GB" sz="2400" dirty="0"/>
-              <a:t>= 2.79</a:t>
+              <a:t>= 2,79</a:t>
             </a:r>
           </a:p>
         </p:txBody>
@@ -14679,7 +14679,7 @@
           <a:p>
             <a:r>
               <a:rPr lang="en-GB" sz="2400" dirty="0"/>
-              <a:t>= 4.1</a:t>
+              <a:t>= 4,1</a:t>
             </a:r>
           </a:p>
         </p:txBody>
@@ -15033,7 +15033,7 @@
           <a:p>
             <a:r>
               <a:rPr lang="en-GB" sz="2400" dirty="0"/>
-              <a:t>= 4.65</a:t>
+              <a:t>= 4,65</a:t>
             </a:r>
           </a:p>
         </p:txBody>
@@ -15387,7 +15387,7 @@
           <a:p>
             <a:r>
               <a:rPr lang="en-GB" sz="2400" dirty="0"/>
-              <a:t>= 6.89</a:t>
+              <a:t>= 6,89</a:t>
             </a:r>
           </a:p>
         </p:txBody>
@@ -15803,7 +15803,7 @@
           <a:p>
             <a:r>
               <a:rPr lang="en-GB" sz="2400" dirty="0"/>
-              <a:t>= 0.79</a:t>
+              <a:t>= 0,79</a:t>
             </a:r>
           </a:p>
         </p:txBody>
@@ -16157,7 +16157,7 @@
           <a:p>
             <a:r>
               <a:rPr lang="en-GB" sz="2400" dirty="0"/>
-              <a:t>= 7.99</a:t>
+              <a:t>= 7,99</a:t>
             </a:r>
           </a:p>
         </p:txBody>
@@ -16511,7 +16511,7 @@
           <a:p>
             <a:r>
               <a:rPr lang="en-GB" sz="2400" dirty="0"/>
-              <a:t>= 1.78</a:t>
+              <a:t>= 1,78</a:t>
             </a:r>
           </a:p>
         </p:txBody>
@@ -16782,7 +16782,7 @@
           <a:p>
             <a:r>
               <a:rPr lang="en-GB" sz="2400" dirty="0"/>
-              <a:t>= 0.98</a:t>
+              <a:t>= 0,98</a:t>
             </a:r>
           </a:p>
         </p:txBody>
@@ -17066,7 +17066,7 @@
           <a:p>
             <a:r>
               <a:rPr lang="en-GB" sz="2400" dirty="0"/>
-              <a:t>= 2.812</a:t>
+              <a:t>= 2,812</a:t>
             </a:r>
           </a:p>
         </p:txBody>
@@ -17412,7 +17412,7 @@
           <a:p>
             <a:r>
               <a:rPr lang="en-GB" sz="2400" dirty="0"/>
-              <a:t>= 1.935</a:t>
+              <a:t>= 1,935</a:t>
             </a:r>
           </a:p>
         </p:txBody>
@@ -17943,7 +17943,7 @@
           <a:p>
             <a:r>
               <a:rPr lang="en-GB" sz="2400" dirty="0"/>
-              <a:t>= 2.79</a:t>
+              <a:t>= 2,79</a:t>
             </a:r>
           </a:p>
         </p:txBody>
@@ -17978,7 +17978,7 @@
           <a:p>
             <a:r>
               <a:rPr lang="en-GB" sz="2400" dirty="0"/>
-              <a:t>= 4.1</a:t>
+              <a:t>= 4,1</a:t>
             </a:r>
           </a:p>
         </p:txBody>
@@ -18013,7 +18013,7 @@
           <a:p>
             <a:r>
               <a:rPr lang="en-GB" sz="2400" dirty="0"/>
-              <a:t>= 4.65</a:t>
+              <a:t>= 4,65</a:t>
             </a:r>
           </a:p>
         </p:txBody>
@@ -18048,7 +18048,7 @@
           <a:p>
             <a:r>
               <a:rPr lang="en-GB" sz="2400" dirty="0"/>
-              <a:t>= 6.89</a:t>
+              <a:t>= 6,89</a:t>
             </a:r>
           </a:p>
         </p:txBody>
@@ -18118,7 +18118,7 @@
           <a:p>
             <a:r>
               <a:rPr lang="en-GB" sz="2400" dirty="0"/>
-              <a:t>= 0.79</a:t>
+              <a:t>= 0,79</a:t>
             </a:r>
           </a:p>
         </p:txBody>
@@ -18153,7 +18153,7 @@
           <a:p>
             <a:r>
               <a:rPr lang="en-GB" sz="2400" dirty="0"/>
-              <a:t>= 7.99</a:t>
+              <a:t>= 7,99</a:t>
             </a:r>
           </a:p>
         </p:txBody>
@@ -18188,7 +18188,7 @@
           <a:p>
             <a:r>
               <a:rPr lang="en-GB" sz="2400" dirty="0"/>
-              <a:t>= 1.78</a:t>
+              <a:t>= 1,78</a:t>
             </a:r>
           </a:p>
         </p:txBody>
@@ -18223,7 +18223,7 @@
           <a:p>
             <a:r>
               <a:rPr lang="en-GB" sz="2400" dirty="0"/>
-              <a:t>= 0.98</a:t>
+              <a:t>= 0,98</a:t>
             </a:r>
           </a:p>
         </p:txBody>
@@ -18258,7 +18258,7 @@
           <a:p>
             <a:r>
               <a:rPr lang="en-GB" sz="2400" dirty="0"/>
-              <a:t>= 2.812</a:t>
+              <a:t>= 2,812</a:t>
             </a:r>
           </a:p>
         </p:txBody>
@@ -18293,7 +18293,7 @@
           <a:p>
             <a:r>
               <a:rPr lang="en-GB" sz="2400" dirty="0"/>
-              <a:t>= 1.935</a:t>
+              <a:t>= 1,935</a:t>
             </a:r>
           </a:p>
         </p:txBody>
@@ -19676,7 +19676,7 @@
           <a:p>
             <a:r>
               <a:rPr lang="en-GB" sz="2400" dirty="0"/>
-              <a:t>= 2.79</a:t>
+              <a:t>= 2,79</a:t>
             </a:r>
           </a:p>
         </p:txBody>
@@ -19912,7 +19912,7 @@
           <a:p>
             <a:r>
               <a:rPr lang="en-GB" sz="2400" dirty="0"/>
-              <a:t>= 4.1</a:t>
+              <a:t>= 4,1</a:t>
             </a:r>
           </a:p>
         </p:txBody>
@@ -20266,7 +20266,7 @@
           <a:p>
             <a:r>
               <a:rPr lang="en-GB" sz="2400" dirty="0"/>
-              <a:t>= 4.65</a:t>
+              <a:t>= 4,65</a:t>
             </a:r>
           </a:p>
         </p:txBody>
@@ -20620,7 +20620,7 @@
           <a:p>
             <a:r>
               <a:rPr lang="en-GB" sz="2400" dirty="0"/>
-              <a:t>= 6.89</a:t>
+              <a:t>= 6,89</a:t>
             </a:r>
           </a:p>
         </p:txBody>
@@ -21036,7 +21036,7 @@
           <a:p>
             <a:r>
               <a:rPr lang="en-GB" sz="2400" dirty="0"/>
-              <a:t>= 0.79</a:t>
+              <a:t>= 0,79</a:t>
             </a:r>
           </a:p>
         </p:txBody>
@@ -21390,7 +21390,7 @@
           <a:p>
             <a:r>
               <a:rPr lang="en-GB" sz="2400" dirty="0"/>
-              <a:t>= 7.99</a:t>
+              <a:t>= 7,99</a:t>
             </a:r>
           </a:p>
         </p:txBody>
@@ -21744,7 +21744,7 @@
           <a:p>
             <a:r>
               <a:rPr lang="en-GB" sz="2400" dirty="0"/>
-              <a:t>= 1.78</a:t>
+              <a:t>= 1,78</a:t>
             </a:r>
           </a:p>
         </p:txBody>
@@ -22015,7 +22015,7 @@
           <a:p>
             <a:r>
               <a:rPr lang="en-GB" sz="2400" dirty="0"/>
-              <a:t>= 0.98</a:t>
+              <a:t>= 0,98</a:t>
             </a:r>
           </a:p>
         </p:txBody>
@@ -22299,7 +22299,7 @@
           <a:p>
             <a:r>
               <a:rPr lang="en-GB" sz="2400" dirty="0"/>
-              <a:t>= 2.812</a:t>
+              <a:t>= 2,812</a:t>
             </a:r>
           </a:p>
         </p:txBody>
@@ -22645,7 +22645,7 @@
           <a:p>
             <a:r>
               <a:rPr lang="en-GB" sz="2400" dirty="0"/>
-              <a:t>= 1.935</a:t>
+              <a:t>= 1,935</a:t>
             </a:r>
           </a:p>
         </p:txBody>
@@ -23007,7 +23007,7 @@
           <a:p>
             <a:r>
               <a:rPr lang="en-GB" sz="2400" dirty="0"/>
-              <a:t>= 4.55</a:t>
+              <a:t>= 4,55</a:t>
             </a:r>
           </a:p>
         </p:txBody>
@@ -23119,7 +23119,7 @@
           <a:p>
             <a:r>
               <a:rPr lang="en-GB" sz="2400" dirty="0"/>
-              <a:t>= 2.92</a:t>
+              <a:t>= 2,92</a:t>
             </a:r>
           </a:p>
         </p:txBody>
@@ -23161,7 +23161,7 @@
           <a:p>
             <a:r>
               <a:rPr lang="en-GB" sz="2400" dirty="0"/>
-              <a:t>= 1.87</a:t>
+              <a:t>= 1,87</a:t>
             </a:r>
           </a:p>
         </p:txBody>
@@ -23203,7 +23203,7 @@
           <a:p>
             <a:r>
               <a:rPr lang="en-GB" sz="2400" dirty="0"/>
-              <a:t>= 0.99</a:t>
+              <a:t>= 0,99</a:t>
             </a:r>
           </a:p>
         </p:txBody>
@@ -23344,7 +23344,7 @@
           <a:p>
             <a:r>
               <a:rPr lang="en-GB" sz="2400" dirty="0"/>
-              <a:t>= 2.79</a:t>
+              <a:t>= 2,79</a:t>
             </a:r>
           </a:p>
         </p:txBody>
@@ -23379,7 +23379,7 @@
           <a:p>
             <a:r>
               <a:rPr lang="en-GB" sz="2400" dirty="0"/>
-              <a:t>= 4.1</a:t>
+              <a:t>= 4,1</a:t>
             </a:r>
           </a:p>
         </p:txBody>
@@ -23414,7 +23414,7 @@
           <a:p>
             <a:r>
               <a:rPr lang="en-GB" sz="2400" dirty="0"/>
-              <a:t>= 4.65</a:t>
+              <a:t>= 4,65</a:t>
             </a:r>
           </a:p>
         </p:txBody>
@@ -23449,7 +23449,7 @@
           <a:p>
             <a:r>
               <a:rPr lang="en-GB" sz="2400" dirty="0"/>
-              <a:t>= 6.89</a:t>
+              <a:t>= 6,89</a:t>
             </a:r>
           </a:p>
         </p:txBody>
@@ -23519,7 +23519,7 @@
           <a:p>
             <a:r>
               <a:rPr lang="en-GB" sz="2400" dirty="0"/>
-              <a:t>= 0.79</a:t>
+              <a:t>= 0,79</a:t>
             </a:r>
           </a:p>
         </p:txBody>
@@ -23554,7 +23554,7 @@
           <a:p>
             <a:r>
               <a:rPr lang="en-GB" sz="2400" dirty="0"/>
-              <a:t>= 7.99</a:t>
+              <a:t>= 7,99</a:t>
             </a:r>
           </a:p>
         </p:txBody>
@@ -23589,7 +23589,7 @@
           <a:p>
             <a:r>
               <a:rPr lang="en-GB" sz="2400" dirty="0"/>
-              <a:t>= 1.78</a:t>
+              <a:t>= 1,78</a:t>
             </a:r>
           </a:p>
         </p:txBody>
@@ -23624,7 +23624,7 @@
           <a:p>
             <a:r>
               <a:rPr lang="en-GB" sz="2400" dirty="0"/>
-              <a:t>= 0.98</a:t>
+              <a:t>= 0,98</a:t>
             </a:r>
           </a:p>
         </p:txBody>
@@ -23659,7 +23659,7 @@
           <a:p>
             <a:r>
               <a:rPr lang="en-GB" sz="2400" dirty="0"/>
-              <a:t>= 2.812</a:t>
+              <a:t>= 2,812</a:t>
             </a:r>
           </a:p>
         </p:txBody>
@@ -23694,7 +23694,7 @@
           <a:p>
             <a:r>
               <a:rPr lang="en-GB" sz="2400" dirty="0"/>
-              <a:t>= 1.935</a:t>
+              <a:t>= 1,935</a:t>
             </a:r>
           </a:p>
         </p:txBody>
@@ -25077,7 +25077,7 @@
           <a:p>
             <a:r>
               <a:rPr lang="en-GB" sz="2400" dirty="0"/>
-              <a:t>= 2.79</a:t>
+              <a:t>= 2,79</a:t>
             </a:r>
           </a:p>
         </p:txBody>
@@ -25313,7 +25313,7 @@
           <a:p>
             <a:r>
               <a:rPr lang="en-GB" sz="2400" dirty="0"/>
-              <a:t>= 4.1</a:t>
+              <a:t>= 4,1</a:t>
             </a:r>
           </a:p>
         </p:txBody>
@@ -25667,7 +25667,7 @@
           <a:p>
             <a:r>
               <a:rPr lang="en-GB" sz="2400" dirty="0"/>
-              <a:t>= 4.65</a:t>
+              <a:t>= 4,65</a:t>
             </a:r>
           </a:p>
         </p:txBody>
@@ -26021,7 +26021,7 @@
           <a:p>
             <a:r>
               <a:rPr lang="en-GB" sz="2400" dirty="0"/>
-              <a:t>= 6.89</a:t>
+              <a:t>= 6,89</a:t>
             </a:r>
           </a:p>
         </p:txBody>
@@ -26437,7 +26437,7 @@
           <a:p>
             <a:r>
               <a:rPr lang="en-GB" sz="2400" dirty="0"/>
-              <a:t>= 0.79</a:t>
+              <a:t>= 0,79</a:t>
             </a:r>
           </a:p>
         </p:txBody>
@@ -26791,7 +26791,7 @@
           <a:p>
             <a:r>
               <a:rPr lang="en-GB" sz="2400" dirty="0"/>
-              <a:t>= 7.99</a:t>
+              <a:t>= 7,99</a:t>
             </a:r>
           </a:p>
         </p:txBody>
@@ -27145,7 +27145,7 @@
           <a:p>
             <a:r>
               <a:rPr lang="en-GB" sz="2400" dirty="0"/>
-              <a:t>= 1.78</a:t>
+              <a:t>= 1,78</a:t>
             </a:r>
           </a:p>
         </p:txBody>
@@ -27416,7 +27416,7 @@
           <a:p>
             <a:r>
               <a:rPr lang="en-GB" sz="2400" dirty="0"/>
-              <a:t>= 0.98</a:t>
+              <a:t>= 0,98</a:t>
             </a:r>
           </a:p>
         </p:txBody>
@@ -27700,7 +27700,7 @@
           <a:p>
             <a:r>
               <a:rPr lang="en-GB" sz="2400" dirty="0"/>
-              <a:t>= 2.812</a:t>
+              <a:t>= 2,812</a:t>
             </a:r>
           </a:p>
         </p:txBody>
@@ -28046,7 +28046,7 @@
           <a:p>
             <a:r>
               <a:rPr lang="en-GB" sz="2400" dirty="0"/>
-              <a:t>= 1.935</a:t>
+              <a:t>= 1,935</a:t>
             </a:r>
           </a:p>
         </p:txBody>
